--- a/备选资产/结构图/循环闭环-001/example.pptx
+++ b/备选资产/结构图/循环闭环-001/example.pptx
@@ -2,13 +2,13 @@
 <file path=ppt/presentation.xml><?xml version="1.0" encoding="utf-8"?>
 <p:presentation xmlns:p="http://schemas.openxmlformats.org/presentationml/2006/main">
   <p:sldMasterIdLst>
-    <p:sldMasterId xmlns:r="http://schemas.openxmlformats.org/officeDocument/2006/relationships" id="2147483648" r:id="Rd49d345511784cdb"/>
+    <p:sldMasterId xmlns:r="http://schemas.openxmlformats.org/officeDocument/2006/relationships" id="2147483648" r:id="R4ab2665b7df94a85"/>
   </p:sldMasterIdLst>
   <p:notesMasterIdLst>
-    <p:notesMasterId xmlns:r="http://schemas.openxmlformats.org/officeDocument/2006/relationships" r:id="Raf01adb6511647a2"/>
+    <p:notesMasterId xmlns:r="http://schemas.openxmlformats.org/officeDocument/2006/relationships" r:id="R199aa02052804963"/>
   </p:notesMasterIdLst>
   <p:sldIdLst>
-    <p:sldId xmlns:r="http://schemas.openxmlformats.org/officeDocument/2006/relationships" id="256" r:id="Rba9857371acf4d88"/>
+    <p:sldId xmlns:r="http://schemas.openxmlformats.org/officeDocument/2006/relationships" id="256" r:id="Rf9292f42be5d453f"/>
   </p:sldIdLst>
   <p:sldSz cx="12192000" cy="6858000"/>
   <p:notesSz cx="6858000" cy="9144000"/>
@@ -506,7 +506,7 @@
   </p:cSld>
   <p:clrMap bg1="lt1" tx1="dk1" bg2="lt2" tx2="dk2" accent1="accent1" accent2="accent2" accent3="accent3" accent4="accent4" accent5="accent5" accent6="accent6" hlink="hlink" folHlink="folHlink"/>
   <p:sldLayoutIdLst>
-    <p:sldLayoutId xmlns:r="http://schemas.openxmlformats.org/officeDocument/2006/relationships" id="2147483649" r:id="Rf8848fb75bdb4f29"/>
+    <p:sldLayoutId xmlns:r="http://schemas.openxmlformats.org/officeDocument/2006/relationships" id="2147483649" r:id="R733edb1d0f074af4"/>
   </p:sldLayoutIdLst>
   <p:txStyles>
     <p:titleStyle>
@@ -1054,10 +1054,10 @@
       </p:grpSpPr>
       <p:sp>
         <p:nvSpPr>
-          <p:cNvPr id="12" name="">
-            <a:extLst xmlns:a="http://schemas.openxmlformats.org/drawingml/2006/main">
-              <a:ext uri="{FF2B5EF4-FFF2-40B4-BE49-F238E27FC236}">
-                <a16:creationId xmlns:a16="http://schemas.microsoft.com/office/drawing/2014/main" id="{39267D32-8471-4CA9-8216-7EBBB82D05B4}"/>
+          <p:cNvPr id="30" name="">
+            <a:extLst xmlns:a="http://schemas.openxmlformats.org/drawingml/2006/main">
+              <a:ext uri="{FF2B5EF4-FFF2-40B4-BE49-F238E27FC236}">
+                <a16:creationId xmlns:a16="http://schemas.microsoft.com/office/drawing/2014/main" id="{A1537E04-09FE-4451-8F32-D40FB10D7263}"/>
               </a:ext>
             </a:extLst>
           </p:cNvPr>
@@ -1115,7 +1115,7 @@
           <p:cNvPr id="2" name="">
             <a:extLst xmlns:a="http://schemas.openxmlformats.org/drawingml/2006/main">
               <a:ext uri="{FF2B5EF4-FFF2-40B4-BE49-F238E27FC236}">
-                <a16:creationId xmlns:a16="http://schemas.microsoft.com/office/drawing/2014/main" id="{84C2238C-E15C-4B0E-840A-97814018C663}"/>
+                <a16:creationId xmlns:a16="http://schemas.microsoft.com/office/drawing/2014/main" id="{556490F7-1CAF-4827-8830-D208C6C92C52}"/>
               </a:ext>
             </a:extLst>
           </p:cNvPr>
@@ -1163,7 +1163,7 @@
                 <a:ea typeface="Microsoft YaHei"/>
                 <a:cs typeface="Microsoft YaHei"/>
               </a:rPr>
-              <a:t>循环闭环</a:t>
+              <a:t>循环主题 · 反馈闭环</a:t>
             </a:r>
           </a:p>
         </p:txBody>
@@ -1173,19 +1173,50 @@
           <p:cNvPr id="3" name="">
             <a:extLst xmlns:a="http://schemas.openxmlformats.org/drawingml/2006/main">
               <a:ext uri="{FF2B5EF4-FFF2-40B4-BE49-F238E27FC236}">
-                <a16:creationId xmlns:a16="http://schemas.microsoft.com/office/drawing/2014/main" id="{08E85B39-4998-4DEB-A5EC-85D9B287B968}"/>
-              </a:ext>
-            </a:extLst>
-          </p:cNvPr>
-          <p:cNvSpPr>
-            <a:spLocks xmlns:a="http://schemas.openxmlformats.org/drawingml/2006/main" noGrp="1"/>
-          </p:cNvSpPr>
-          <p:nvPr/>
-        </p:nvSpPr>
-        <p:spPr>
-          <a:xfrm xmlns:a="http://schemas.openxmlformats.org/drawingml/2006/main">
-            <a:off x="4953000" y="2571750"/>
-            <a:ext cx="2286000" cy="2286000"/>
+                <a16:creationId xmlns:a16="http://schemas.microsoft.com/office/drawing/2014/main" id="{A8BE78C1-FFCB-4EB7-8688-20154151F0D5}"/>
+              </a:ext>
+            </a:extLst>
+          </p:cNvPr>
+          <p:cNvSpPr>
+            <a:spLocks xmlns:a="http://schemas.openxmlformats.org/drawingml/2006/main" noGrp="1"/>
+          </p:cNvSpPr>
+          <p:nvPr/>
+        </p:nvSpPr>
+        <p:spPr>
+          <a:xfrm xmlns:a="http://schemas.openxmlformats.org/drawingml/2006/main">
+            <a:off x="4171950" y="1743075"/>
+            <a:ext cx="3848100" cy="3848100"/>
+          </a:xfrm>
+          <a:prstGeom xmlns:a="http://schemas.openxmlformats.org/drawingml/2006/main" prst="ellipse">
+            <a:avLst/>
+          </a:prstGeom>
+          <a:noFill xmlns:a="http://schemas.openxmlformats.org/drawingml/2006/main"/>
+          <a:ln xmlns:a="http://schemas.openxmlformats.org/drawingml/2006/main" w="133350">
+            <a:solidFill>
+              <a:srgbClr val="D9EAF8"/>
+            </a:solidFill>
+            <a:prstDash val="solid"/>
+          </a:ln>
+        </p:spPr>
+      </p:sp>
+      <p:sp>
+        <p:nvSpPr>
+          <p:cNvPr id="4" name="">
+            <a:extLst xmlns:a="http://schemas.openxmlformats.org/drawingml/2006/main">
+              <a:ext uri="{FF2B5EF4-FFF2-40B4-BE49-F238E27FC236}">
+                <a16:creationId xmlns:a16="http://schemas.microsoft.com/office/drawing/2014/main" id="{34A8D98E-2DA3-4A62-A13B-0CEFCF0BFFB5}"/>
+              </a:ext>
+            </a:extLst>
+          </p:cNvPr>
+          <p:cNvSpPr>
+            <a:spLocks xmlns:a="http://schemas.openxmlformats.org/drawingml/2006/main" noGrp="1"/>
+          </p:cNvSpPr>
+          <p:nvPr/>
+        </p:nvSpPr>
+        <p:spPr>
+          <a:xfrm xmlns:a="http://schemas.openxmlformats.org/drawingml/2006/main">
+            <a:off x="4552950" y="2124075"/>
+            <a:ext cx="3086100" cy="3086100"/>
           </a:xfrm>
           <a:prstGeom xmlns:a="http://schemas.openxmlformats.org/drawingml/2006/main" prst="ellipse">
             <a:avLst/>
@@ -1193,9 +1224,9 @@
           <a:solidFill xmlns:a="http://schemas.openxmlformats.org/drawingml/2006/main">
             <a:srgbClr val="FFFFFF"/>
           </a:solidFill>
-          <a:ln xmlns:a="http://schemas.openxmlformats.org/drawingml/2006/main" w="76200">
+          <a:ln xmlns:a="http://schemas.openxmlformats.org/drawingml/2006/main" w="19050">
             <a:solidFill>
-              <a:srgbClr val="DCEEFF"/>
+              <a:srgbClr val="B8DAF4"/>
             </a:solidFill>
             <a:prstDash val="solid"/>
           </a:ln>
@@ -1203,7 +1234,170 @@
         <p:style>
           <a:lnRef xmlns:a="http://schemas.openxmlformats.org/drawingml/2006/main" idx="0"/>
           <a:fillRef xmlns:a="http://schemas.openxmlformats.org/drawingml/2006/main" idx="0"/>
-          <a:effectRef xmlns:a="http://schemas.openxmlformats.org/drawingml/2006/main" idx="6"/>
+          <a:effectRef xmlns:a="http://schemas.openxmlformats.org/drawingml/2006/main" idx="4"/>
+          <a:fontRef xmlns:a="http://schemas.openxmlformats.org/drawingml/2006/main" idx="major"/>
+        </p:style>
+      </p:sp>
+      <p:sp>
+        <p:nvSpPr>
+          <p:cNvPr id="5" name="">
+            <a:extLst xmlns:a="http://schemas.openxmlformats.org/drawingml/2006/main">
+              <a:ext uri="{FF2B5EF4-FFF2-40B4-BE49-F238E27FC236}">
+                <a16:creationId xmlns:a16="http://schemas.microsoft.com/office/drawing/2014/main" id="{0E5F77FB-728A-4DF4-8E9B-CA0D1F774A0C}"/>
+              </a:ext>
+            </a:extLst>
+          </p:cNvPr>
+          <p:cNvSpPr>
+            <a:spLocks xmlns:a="http://schemas.openxmlformats.org/drawingml/2006/main" noGrp="1"/>
+          </p:cNvSpPr>
+          <p:nvPr/>
+        </p:nvSpPr>
+        <p:spPr>
+          <a:xfrm xmlns:a="http://schemas.openxmlformats.org/drawingml/2006/main">
+            <a:off x="5572125" y="1724025"/>
+            <a:ext cx="1047750" cy="266700"/>
+          </a:xfrm>
+          <a:prstGeom xmlns:a="http://schemas.openxmlformats.org/drawingml/2006/main" prst="rightArrow">
+            <a:avLst/>
+          </a:prstGeom>
+          <a:solidFill xmlns:a="http://schemas.openxmlformats.org/drawingml/2006/main">
+            <a:srgbClr val="1677C8"/>
+          </a:solidFill>
+          <a:ln xmlns:a="http://schemas.openxmlformats.org/drawingml/2006/main" w="0">
+            <a:noFill/>
+            <a:prstDash val="solid"/>
+          </a:ln>
+        </p:spPr>
+      </p:sp>
+      <p:sp>
+        <p:nvSpPr>
+          <p:cNvPr id="6" name="">
+            <a:extLst xmlns:a="http://schemas.openxmlformats.org/drawingml/2006/main">
+              <a:ext uri="{FF2B5EF4-FFF2-40B4-BE49-F238E27FC236}">
+                <a16:creationId xmlns:a16="http://schemas.microsoft.com/office/drawing/2014/main" id="{43C9B8B4-732F-424C-8403-FAD55A384E70}"/>
+              </a:ext>
+            </a:extLst>
+          </p:cNvPr>
+          <p:cNvSpPr>
+            <a:spLocks xmlns:a="http://schemas.openxmlformats.org/drawingml/2006/main" noGrp="1"/>
+          </p:cNvSpPr>
+          <p:nvPr/>
+        </p:nvSpPr>
+        <p:spPr>
+          <a:xfrm xmlns:a="http://schemas.openxmlformats.org/drawingml/2006/main">
+            <a:off x="7734300" y="3143250"/>
+            <a:ext cx="266700" cy="1047750"/>
+          </a:xfrm>
+          <a:prstGeom xmlns:a="http://schemas.openxmlformats.org/drawingml/2006/main" prst="downArrow">
+            <a:avLst/>
+          </a:prstGeom>
+          <a:solidFill xmlns:a="http://schemas.openxmlformats.org/drawingml/2006/main">
+            <a:srgbClr val="1677C8"/>
+          </a:solidFill>
+          <a:ln xmlns:a="http://schemas.openxmlformats.org/drawingml/2006/main" w="0">
+            <a:noFill/>
+            <a:prstDash val="solid"/>
+          </a:ln>
+        </p:spPr>
+      </p:sp>
+      <p:sp>
+        <p:nvSpPr>
+          <p:cNvPr id="7" name="">
+            <a:extLst xmlns:a="http://schemas.openxmlformats.org/drawingml/2006/main">
+              <a:ext uri="{FF2B5EF4-FFF2-40B4-BE49-F238E27FC236}">
+                <a16:creationId xmlns:a16="http://schemas.microsoft.com/office/drawing/2014/main" id="{15FA1D86-8EEF-4918-B670-96C4824AA2F6}"/>
+              </a:ext>
+            </a:extLst>
+          </p:cNvPr>
+          <p:cNvSpPr>
+            <a:spLocks xmlns:a="http://schemas.openxmlformats.org/drawingml/2006/main" noGrp="1"/>
+          </p:cNvSpPr>
+          <p:nvPr/>
+        </p:nvSpPr>
+        <p:spPr>
+          <a:xfrm xmlns:a="http://schemas.openxmlformats.org/drawingml/2006/main">
+            <a:off x="5572125" y="5343525"/>
+            <a:ext cx="1047750" cy="266700"/>
+          </a:xfrm>
+          <a:prstGeom xmlns:a="http://schemas.openxmlformats.org/drawingml/2006/main" prst="leftArrow">
+            <a:avLst/>
+          </a:prstGeom>
+          <a:solidFill xmlns:a="http://schemas.openxmlformats.org/drawingml/2006/main">
+            <a:srgbClr val="1677C8"/>
+          </a:solidFill>
+          <a:ln xmlns:a="http://schemas.openxmlformats.org/drawingml/2006/main" w="0">
+            <a:noFill/>
+            <a:prstDash val="solid"/>
+          </a:ln>
+        </p:spPr>
+      </p:sp>
+      <p:sp>
+        <p:nvSpPr>
+          <p:cNvPr id="8" name="">
+            <a:extLst xmlns:a="http://schemas.openxmlformats.org/drawingml/2006/main">
+              <a:ext uri="{FF2B5EF4-FFF2-40B4-BE49-F238E27FC236}">
+                <a16:creationId xmlns:a16="http://schemas.microsoft.com/office/drawing/2014/main" id="{1545BFD6-0B00-4947-93ED-D7CDD6D3C510}"/>
+              </a:ext>
+            </a:extLst>
+          </p:cNvPr>
+          <p:cNvSpPr>
+            <a:spLocks xmlns:a="http://schemas.openxmlformats.org/drawingml/2006/main" noGrp="1"/>
+          </p:cNvSpPr>
+          <p:nvPr/>
+        </p:nvSpPr>
+        <p:spPr>
+          <a:xfrm xmlns:a="http://schemas.openxmlformats.org/drawingml/2006/main">
+            <a:off x="4191000" y="3143250"/>
+            <a:ext cx="266700" cy="1047750"/>
+          </a:xfrm>
+          <a:prstGeom xmlns:a="http://schemas.openxmlformats.org/drawingml/2006/main" prst="upArrow">
+            <a:avLst/>
+          </a:prstGeom>
+          <a:solidFill xmlns:a="http://schemas.openxmlformats.org/drawingml/2006/main">
+            <a:srgbClr val="1677C8"/>
+          </a:solidFill>
+          <a:ln xmlns:a="http://schemas.openxmlformats.org/drawingml/2006/main" w="0">
+            <a:noFill/>
+            <a:prstDash val="solid"/>
+          </a:ln>
+        </p:spPr>
+      </p:sp>
+      <p:sp>
+        <p:nvSpPr>
+          <p:cNvPr id="9" name="">
+            <a:extLst xmlns:a="http://schemas.openxmlformats.org/drawingml/2006/main">
+              <a:ext uri="{FF2B5EF4-FFF2-40B4-BE49-F238E27FC236}">
+                <a16:creationId xmlns:a16="http://schemas.microsoft.com/office/drawing/2014/main" id="{85CB7C5A-4A76-4EC5-88CA-0002689D33F8}"/>
+              </a:ext>
+            </a:extLst>
+          </p:cNvPr>
+          <p:cNvSpPr>
+            <a:spLocks xmlns:a="http://schemas.openxmlformats.org/drawingml/2006/main" noGrp="1"/>
+          </p:cNvSpPr>
+          <p:nvPr/>
+        </p:nvSpPr>
+        <p:spPr>
+          <a:xfrm xmlns:a="http://schemas.openxmlformats.org/drawingml/2006/main">
+            <a:off x="5000625" y="2571750"/>
+            <a:ext cx="2190750" cy="2190750"/>
+          </a:xfrm>
+          <a:prstGeom xmlns:a="http://schemas.openxmlformats.org/drawingml/2006/main" prst="ellipse">
+            <a:avLst/>
+          </a:prstGeom>
+          <a:solidFill xmlns:a="http://schemas.openxmlformats.org/drawingml/2006/main">
+            <a:srgbClr val="1677C8"/>
+          </a:solidFill>
+          <a:ln xmlns:a="http://schemas.openxmlformats.org/drawingml/2006/main" w="38100">
+            <a:solidFill>
+              <a:srgbClr val="FFFFFF"/>
+            </a:solidFill>
+            <a:prstDash val="solid"/>
+          </a:ln>
+        </p:spPr>
+        <p:style>
+          <a:lnRef xmlns:a="http://schemas.openxmlformats.org/drawingml/2006/main" idx="0"/>
+          <a:fillRef xmlns:a="http://schemas.openxmlformats.org/drawingml/2006/main" idx="0"/>
+          <a:effectRef xmlns:a="http://schemas.openxmlformats.org/drawingml/2006/main" idx="7"/>
           <a:fontRef xmlns:a="http://schemas.openxmlformats.org/drawingml/2006/main" idx="major"/>
         </p:style>
         <p:txBody>
@@ -1215,7 +1409,7 @@
             <a:pPr algn="ctr">
               <a:defRPr sz="2100" b="1">
                 <a:solidFill>
-                  <a:srgbClr val="1677C8"/>
+                  <a:srgbClr val="FFFFFF"/>
                 </a:solidFill>
                 <a:latin typeface="Microsoft YaHei"/>
                 <a:ea typeface="Microsoft YaHei"/>
@@ -1225,7 +1419,7 @@
             <a:r>
               <a:rPr sz="2100" b="1">
                 <a:solidFill>
-                  <a:srgbClr val="1677C8"/>
+                  <a:srgbClr val="FFFFFF"/>
                 </a:solidFill>
                 <a:latin typeface="Microsoft YaHei"/>
                 <a:ea typeface="Microsoft YaHei"/>
@@ -1238,48 +1432,241 @@
       </p:sp>
       <p:sp>
         <p:nvSpPr>
-          <p:cNvPr id="4" name="">
-            <a:extLst xmlns:a="http://schemas.openxmlformats.org/drawingml/2006/main">
-              <a:ext uri="{FF2B5EF4-FFF2-40B4-BE49-F238E27FC236}">
-                <a16:creationId xmlns:a16="http://schemas.microsoft.com/office/drawing/2014/main" id="{F3C23827-5140-477B-A08A-4D28D104E7C4}"/>
-              </a:ext>
-            </a:extLst>
-          </p:cNvPr>
-          <p:cNvSpPr>
-            <a:spLocks xmlns:a="http://schemas.openxmlformats.org/drawingml/2006/main" noGrp="1"/>
-          </p:cNvSpPr>
-          <p:nvPr/>
-        </p:nvSpPr>
-        <p:spPr>
-          <a:xfrm xmlns:a="http://schemas.openxmlformats.org/drawingml/2006/main">
-            <a:off x="4953000" y="1381125"/>
-            <a:ext cx="1619250" cy="1047750"/>
+          <p:cNvPr id="10" name="">
+            <a:extLst xmlns:a="http://schemas.openxmlformats.org/drawingml/2006/main">
+              <a:ext uri="{FF2B5EF4-FFF2-40B4-BE49-F238E27FC236}">
+                <a16:creationId xmlns:a16="http://schemas.microsoft.com/office/drawing/2014/main" id="{B5519274-E59D-444E-84E8-7CD1706FF3CC}"/>
+              </a:ext>
+            </a:extLst>
+          </p:cNvPr>
+          <p:cNvSpPr>
+            <a:spLocks xmlns:a="http://schemas.openxmlformats.org/drawingml/2006/main" noGrp="1"/>
+          </p:cNvSpPr>
+          <p:nvPr/>
+        </p:nvSpPr>
+        <p:spPr>
+          <a:xfrm xmlns:a="http://schemas.openxmlformats.org/drawingml/2006/main">
+            <a:off x="5857875" y="1562100"/>
+            <a:ext cx="476250" cy="476250"/>
           </a:xfrm>
           <a:prstGeom xmlns:a="http://schemas.openxmlformats.org/drawingml/2006/main" prst="ellipse">
             <a:avLst/>
           </a:prstGeom>
           <a:solidFill xmlns:a="http://schemas.openxmlformats.org/drawingml/2006/main">
-            <a:srgbClr val="1677C8"/>
-          </a:solidFill>
-          <a:ln xmlns:a="http://schemas.openxmlformats.org/drawingml/2006/main" w="0">
-            <a:noFill/>
+            <a:srgbClr val="14CBD1"/>
+          </a:solidFill>
+          <a:ln xmlns:a="http://schemas.openxmlformats.org/drawingml/2006/main" w="28575">
+            <a:solidFill>
+              <a:srgbClr val="FFFFFF"/>
+            </a:solidFill>
             <a:prstDash val="solid"/>
           </a:ln>
         </p:spPr>
         <p:style>
           <a:lnRef xmlns:a="http://schemas.openxmlformats.org/drawingml/2006/main" idx="0"/>
           <a:fillRef xmlns:a="http://schemas.openxmlformats.org/drawingml/2006/main" idx="0"/>
-          <a:effectRef xmlns:a="http://schemas.openxmlformats.org/drawingml/2006/main" idx="6"/>
+          <a:effectRef xmlns:a="http://schemas.openxmlformats.org/drawingml/2006/main" idx="4"/>
           <a:fontRef xmlns:a="http://schemas.openxmlformats.org/drawingml/2006/main" idx="major"/>
         </p:style>
+      </p:sp>
+      <p:sp>
+        <p:nvSpPr>
+          <p:cNvPr id="11" name="">
+            <a:extLst xmlns:a="http://schemas.openxmlformats.org/drawingml/2006/main">
+              <a:ext uri="{FF2B5EF4-FFF2-40B4-BE49-F238E27FC236}">
+                <a16:creationId xmlns:a16="http://schemas.microsoft.com/office/drawing/2014/main" id="{50C61F4E-1F4F-41A9-B546-F0A489612157}"/>
+              </a:ext>
+            </a:extLst>
+          </p:cNvPr>
+          <p:cNvSpPr>
+            <a:spLocks xmlns:a="http://schemas.openxmlformats.org/drawingml/2006/main" noGrp="1"/>
+          </p:cNvSpPr>
+          <p:nvPr/>
+        </p:nvSpPr>
+        <p:spPr>
+          <a:xfrm xmlns:a="http://schemas.openxmlformats.org/drawingml/2006/main">
+            <a:off x="7772400" y="3429000"/>
+            <a:ext cx="476250" cy="476250"/>
+          </a:xfrm>
+          <a:prstGeom xmlns:a="http://schemas.openxmlformats.org/drawingml/2006/main" prst="ellipse">
+            <a:avLst/>
+          </a:prstGeom>
+          <a:solidFill xmlns:a="http://schemas.openxmlformats.org/drawingml/2006/main">
+            <a:srgbClr val="00A8D8"/>
+          </a:solidFill>
+          <a:ln xmlns:a="http://schemas.openxmlformats.org/drawingml/2006/main" w="28575">
+            <a:solidFill>
+              <a:srgbClr val="FFFFFF"/>
+            </a:solidFill>
+            <a:prstDash val="solid"/>
+          </a:ln>
+        </p:spPr>
+        <p:style>
+          <a:lnRef xmlns:a="http://schemas.openxmlformats.org/drawingml/2006/main" idx="0"/>
+          <a:fillRef xmlns:a="http://schemas.openxmlformats.org/drawingml/2006/main" idx="0"/>
+          <a:effectRef xmlns:a="http://schemas.openxmlformats.org/drawingml/2006/main" idx="4"/>
+          <a:fontRef xmlns:a="http://schemas.openxmlformats.org/drawingml/2006/main" idx="major"/>
+        </p:style>
+      </p:sp>
+      <p:sp>
+        <p:nvSpPr>
+          <p:cNvPr id="12" name="">
+            <a:extLst xmlns:a="http://schemas.openxmlformats.org/drawingml/2006/main">
+              <a:ext uri="{FF2B5EF4-FFF2-40B4-BE49-F238E27FC236}">
+                <a16:creationId xmlns:a16="http://schemas.microsoft.com/office/drawing/2014/main" id="{2B0B7161-500E-4461-9533-8FE838978301}"/>
+              </a:ext>
+            </a:extLst>
+          </p:cNvPr>
+          <p:cNvSpPr>
+            <a:spLocks xmlns:a="http://schemas.openxmlformats.org/drawingml/2006/main" noGrp="1"/>
+          </p:cNvSpPr>
+          <p:nvPr/>
+        </p:nvSpPr>
+        <p:spPr>
+          <a:xfrm xmlns:a="http://schemas.openxmlformats.org/drawingml/2006/main">
+            <a:off x="5857875" y="5295900"/>
+            <a:ext cx="476250" cy="476250"/>
+          </a:xfrm>
+          <a:prstGeom xmlns:a="http://schemas.openxmlformats.org/drawingml/2006/main" prst="ellipse">
+            <a:avLst/>
+          </a:prstGeom>
+          <a:solidFill xmlns:a="http://schemas.openxmlformats.org/drawingml/2006/main">
+            <a:srgbClr val="14CBD1"/>
+          </a:solidFill>
+          <a:ln xmlns:a="http://schemas.openxmlformats.org/drawingml/2006/main" w="28575">
+            <a:solidFill>
+              <a:srgbClr val="FFFFFF"/>
+            </a:solidFill>
+            <a:prstDash val="solid"/>
+          </a:ln>
+        </p:spPr>
+        <p:style>
+          <a:lnRef xmlns:a="http://schemas.openxmlformats.org/drawingml/2006/main" idx="0"/>
+          <a:fillRef xmlns:a="http://schemas.openxmlformats.org/drawingml/2006/main" idx="0"/>
+          <a:effectRef xmlns:a="http://schemas.openxmlformats.org/drawingml/2006/main" idx="4"/>
+          <a:fontRef xmlns:a="http://schemas.openxmlformats.org/drawingml/2006/main" idx="major"/>
+        </p:style>
+      </p:sp>
+      <p:sp>
+        <p:nvSpPr>
+          <p:cNvPr id="13" name="">
+            <a:extLst xmlns:a="http://schemas.openxmlformats.org/drawingml/2006/main">
+              <a:ext uri="{FF2B5EF4-FFF2-40B4-BE49-F238E27FC236}">
+                <a16:creationId xmlns:a16="http://schemas.microsoft.com/office/drawing/2014/main" id="{3D1FA38E-17EA-4064-9BFD-441ADFCA32C8}"/>
+              </a:ext>
+            </a:extLst>
+          </p:cNvPr>
+          <p:cNvSpPr>
+            <a:spLocks xmlns:a="http://schemas.openxmlformats.org/drawingml/2006/main" noGrp="1"/>
+          </p:cNvSpPr>
+          <p:nvPr/>
+        </p:nvSpPr>
+        <p:spPr>
+          <a:xfrm xmlns:a="http://schemas.openxmlformats.org/drawingml/2006/main">
+            <a:off x="3943350" y="3429000"/>
+            <a:ext cx="476250" cy="476250"/>
+          </a:xfrm>
+          <a:prstGeom xmlns:a="http://schemas.openxmlformats.org/drawingml/2006/main" prst="ellipse">
+            <a:avLst/>
+          </a:prstGeom>
+          <a:solidFill xmlns:a="http://schemas.openxmlformats.org/drawingml/2006/main">
+            <a:srgbClr val="00A8D8"/>
+          </a:solidFill>
+          <a:ln xmlns:a="http://schemas.openxmlformats.org/drawingml/2006/main" w="28575">
+            <a:solidFill>
+              <a:srgbClr val="FFFFFF"/>
+            </a:solidFill>
+            <a:prstDash val="solid"/>
+          </a:ln>
+        </p:spPr>
+        <p:style>
+          <a:lnRef xmlns:a="http://schemas.openxmlformats.org/drawingml/2006/main" idx="0"/>
+          <a:fillRef xmlns:a="http://schemas.openxmlformats.org/drawingml/2006/main" idx="0"/>
+          <a:effectRef xmlns:a="http://schemas.openxmlformats.org/drawingml/2006/main" idx="4"/>
+          <a:fontRef xmlns:a="http://schemas.openxmlformats.org/drawingml/2006/main" idx="major"/>
+        </p:style>
+      </p:sp>
+      <p:sp>
+        <p:nvSpPr>
+          <p:cNvPr id="14" name="PPAGENT_QA|parent=cycle-step-0|domains=cycle-card,cycle-content">
+            <a:extLst xmlns:a="http://schemas.openxmlformats.org/drawingml/2006/main">
+              <a:ext uri="{FF2B5EF4-FFF2-40B4-BE49-F238E27FC236}">
+                <a16:creationId xmlns:a16="http://schemas.microsoft.com/office/drawing/2014/main" id="{7B542BF9-C9D8-442D-85E6-64D84E585519}"/>
+              </a:ext>
+            </a:extLst>
+          </p:cNvPr>
+          <p:cNvSpPr>
+            <a:spLocks xmlns:a="http://schemas.openxmlformats.org/drawingml/2006/main" noGrp="1"/>
+          </p:cNvSpPr>
+          <p:nvPr/>
+        </p:nvSpPr>
+        <p:spPr>
+          <a:xfrm xmlns:a="http://schemas.openxmlformats.org/drawingml/2006/main">
+            <a:off x="8705850" y="1962150"/>
+            <a:ext cx="2609850" cy="800100"/>
+          </a:xfrm>
+          <a:prstGeom xmlns:a="http://schemas.openxmlformats.org/drawingml/2006/main" prst="roundRect">
+            <a:avLst>
+              <a:gd name="adj" fmla="val 14286"/>
+            </a:avLst>
+          </a:prstGeom>
+          <a:solidFill xmlns:a="http://schemas.openxmlformats.org/drawingml/2006/main">
+            <a:srgbClr val="FFFFFF"/>
+          </a:solidFill>
+          <a:ln xmlns:a="http://schemas.openxmlformats.org/drawingml/2006/main" w="9525">
+            <a:solidFill>
+              <a:srgbClr val="D7E4EF"/>
+            </a:solidFill>
+            <a:prstDash val="solid"/>
+          </a:ln>
+        </p:spPr>
+        <p:style>
+          <a:lnRef xmlns:a="http://schemas.openxmlformats.org/drawingml/2006/main" idx="0"/>
+          <a:fillRef xmlns:a="http://schemas.openxmlformats.org/drawingml/2006/main" idx="0"/>
+          <a:effectRef xmlns:a="http://schemas.openxmlformats.org/drawingml/2006/main" idx="4"/>
+          <a:fontRef xmlns:a="http://schemas.openxmlformats.org/drawingml/2006/main" idx="major"/>
+        </p:style>
+      </p:sp>
+      <p:sp>
+        <p:nvSpPr>
+          <p:cNvPr id="15" name="">
+            <a:extLst xmlns:a="http://schemas.openxmlformats.org/drawingml/2006/main">
+              <a:ext uri="{FF2B5EF4-FFF2-40B4-BE49-F238E27FC236}">
+                <a16:creationId xmlns:a16="http://schemas.microsoft.com/office/drawing/2014/main" id="{CF90129B-AC5F-4327-99E8-66BD0CF94F51}"/>
+              </a:ext>
+            </a:extLst>
+          </p:cNvPr>
+          <p:cNvSpPr>
+            <a:spLocks xmlns:a="http://schemas.openxmlformats.org/drawingml/2006/main" noGrp="1"/>
+          </p:cNvSpPr>
+          <p:nvPr/>
+        </p:nvSpPr>
+        <p:spPr>
+          <a:xfrm xmlns:a="http://schemas.openxmlformats.org/drawingml/2006/main">
+            <a:off x="8705850" y="2124075"/>
+            <a:ext cx="476250" cy="476250"/>
+          </a:xfrm>
+          <a:prstGeom xmlns:a="http://schemas.openxmlformats.org/drawingml/2006/main" prst="ellipse">
+            <a:avLst/>
+          </a:prstGeom>
+          <a:solidFill xmlns:a="http://schemas.openxmlformats.org/drawingml/2006/main">
+            <a:srgbClr val="1677C8"/>
+          </a:solidFill>
+          <a:ln xmlns:a="http://schemas.openxmlformats.org/drawingml/2006/main" w="19050">
+            <a:solidFill>
+              <a:srgbClr val="FFFFFF"/>
+            </a:solidFill>
+            <a:prstDash val="solid"/>
+          </a:ln>
+        </p:spPr>
         <p:txBody>
-          <a:bodyPr xmlns:a="http://schemas.openxmlformats.org/drawingml/2006/main" lIns="114300" tIns="76200" rIns="114300" bIns="76200" anchor="ctr">
+          <a:bodyPr xmlns:a="http://schemas.openxmlformats.org/drawingml/2006/main" lIns="0" tIns="0" rIns="0" bIns="0" anchor="ctr">
             <a:normAutofit fontScale="100000"/>
           </a:bodyPr>
           <a:lstStyle xmlns:a="http://schemas.openxmlformats.org/drawingml/2006/main"/>
           <a:p xmlns:a="http://schemas.openxmlformats.org/drawingml/2006/main">
             <a:pPr algn="ctr">
-              <a:defRPr sz="1500" b="1">
+              <a:defRPr sz="1200" b="1">
                 <a:solidFill>
                   <a:srgbClr val="FFFFFF"/>
                 </a:solidFill>
@@ -1289,7 +1676,7 @@
               </a:defRPr>
             </a:pPr>
             <a:r>
-              <a:rPr sz="1500" b="1">
+              <a:rPr sz="1200" b="1">
                 <a:solidFill>
                   <a:srgbClr val="FFFFFF"/>
                 </a:solidFill>
@@ -1297,55 +1684,208 @@
                 <a:ea typeface="Microsoft YaHei"/>
                 <a:cs typeface="Microsoft YaHei"/>
               </a:rPr>
-              <a:t>计划</a:t>
+              <a:t>01</a:t>
             </a:r>
           </a:p>
         </p:txBody>
       </p:sp>
       <p:sp>
         <p:nvSpPr>
-          <p:cNvPr id="5" name="">
-            <a:extLst xmlns:a="http://schemas.openxmlformats.org/drawingml/2006/main">
-              <a:ext uri="{FF2B5EF4-FFF2-40B4-BE49-F238E27FC236}">
-                <a16:creationId xmlns:a16="http://schemas.microsoft.com/office/drawing/2014/main" id="{CD5B9D45-07AA-473A-893C-53C93B5840DF}"/>
-              </a:ext>
-            </a:extLst>
-          </p:cNvPr>
-          <p:cNvSpPr>
-            <a:spLocks xmlns:a="http://schemas.openxmlformats.org/drawingml/2006/main" noGrp="1"/>
-          </p:cNvSpPr>
-          <p:nvPr/>
-        </p:nvSpPr>
-        <p:spPr>
-          <a:xfrm xmlns:a="http://schemas.openxmlformats.org/drawingml/2006/main">
-            <a:off x="7286625" y="2857500"/>
-            <a:ext cx="1619250" cy="1047750"/>
-          </a:xfrm>
-          <a:prstGeom xmlns:a="http://schemas.openxmlformats.org/drawingml/2006/main" prst="ellipse">
-            <a:avLst/>
-          </a:prstGeom>
-          <a:solidFill xmlns:a="http://schemas.openxmlformats.org/drawingml/2006/main">
-            <a:srgbClr val="00A8D8"/>
-          </a:solidFill>
+          <p:cNvPr id="16" name="">
+            <a:extLst xmlns:a="http://schemas.openxmlformats.org/drawingml/2006/main">
+              <a:ext uri="{FF2B5EF4-FFF2-40B4-BE49-F238E27FC236}">
+                <a16:creationId xmlns:a16="http://schemas.microsoft.com/office/drawing/2014/main" id="{275E94F3-86CD-4CE7-8929-6D8E06524344}"/>
+              </a:ext>
+            </a:extLst>
+          </p:cNvPr>
+          <p:cNvSpPr>
+            <a:spLocks xmlns:a="http://schemas.openxmlformats.org/drawingml/2006/main" noGrp="1"/>
+          </p:cNvSpPr>
+          <p:nvPr/>
+        </p:nvSpPr>
+        <p:spPr>
+          <a:xfrm xmlns:a="http://schemas.openxmlformats.org/drawingml/2006/main">
+            <a:off x="9334500" y="2076450"/>
+            <a:ext cx="1790700" cy="266700"/>
+          </a:xfrm>
+          <a:prstGeom xmlns:a="http://schemas.openxmlformats.org/drawingml/2006/main" prst="rect">
+            <a:avLst/>
+          </a:prstGeom>
+          <a:noFill xmlns:a="http://schemas.openxmlformats.org/drawingml/2006/main"/>
           <a:ln xmlns:a="http://schemas.openxmlformats.org/drawingml/2006/main" w="0">
             <a:noFill/>
+            <a:prstDash val="solid"/>
+          </a:ln>
+        </p:spPr>
+        <p:txBody>
+          <a:bodyPr xmlns:a="http://schemas.openxmlformats.org/drawingml/2006/main" lIns="0" tIns="0" rIns="0" bIns="0" anchor="ctr">
+            <a:normAutofit fontScale="100000"/>
+          </a:bodyPr>
+          <a:lstStyle xmlns:a="http://schemas.openxmlformats.org/drawingml/2006/main"/>
+          <a:p xmlns:a="http://schemas.openxmlformats.org/drawingml/2006/main">
+            <a:pPr algn="l">
+              <a:defRPr sz="1425" b="1">
+                <a:solidFill>
+                  <a:srgbClr val="1677C8"/>
+                </a:solidFill>
+                <a:latin typeface="Microsoft YaHei"/>
+                <a:ea typeface="Microsoft YaHei"/>
+                <a:cs typeface="Microsoft YaHei"/>
+              </a:defRPr>
+            </a:pPr>
+            <a:r>
+              <a:rPr sz="1425" b="1">
+                <a:solidFill>
+                  <a:srgbClr val="1677C8"/>
+                </a:solidFill>
+                <a:latin typeface="Microsoft YaHei"/>
+                <a:ea typeface="Microsoft YaHei"/>
+                <a:cs typeface="Microsoft YaHei"/>
+              </a:rPr>
+              <a:t>观察</a:t>
+            </a:r>
+          </a:p>
+        </p:txBody>
+      </p:sp>
+      <p:sp>
+        <p:nvSpPr>
+          <p:cNvPr id="17" name="">
+            <a:extLst xmlns:a="http://schemas.openxmlformats.org/drawingml/2006/main">
+              <a:ext uri="{FF2B5EF4-FFF2-40B4-BE49-F238E27FC236}">
+                <a16:creationId xmlns:a16="http://schemas.microsoft.com/office/drawing/2014/main" id="{CA82B925-7845-48D8-A2AD-B9AF8869068F}"/>
+              </a:ext>
+            </a:extLst>
+          </p:cNvPr>
+          <p:cNvSpPr>
+            <a:spLocks xmlns:a="http://schemas.openxmlformats.org/drawingml/2006/main" noGrp="1"/>
+          </p:cNvSpPr>
+          <p:nvPr/>
+        </p:nvSpPr>
+        <p:spPr>
+          <a:xfrm xmlns:a="http://schemas.openxmlformats.org/drawingml/2006/main">
+            <a:off x="9334500" y="2362200"/>
+            <a:ext cx="1790700" cy="323850"/>
+          </a:xfrm>
+          <a:prstGeom xmlns:a="http://schemas.openxmlformats.org/drawingml/2006/main" prst="rect">
+            <a:avLst/>
+          </a:prstGeom>
+          <a:noFill xmlns:a="http://schemas.openxmlformats.org/drawingml/2006/main"/>
+          <a:ln xmlns:a="http://schemas.openxmlformats.org/drawingml/2006/main" w="0">
+            <a:noFill/>
+            <a:prstDash val="solid"/>
+          </a:ln>
+        </p:spPr>
+        <p:txBody>
+          <a:bodyPr xmlns:a="http://schemas.openxmlformats.org/drawingml/2006/main" lIns="0" tIns="0" rIns="0" bIns="0" anchor="ctr">
+            <a:normAutofit fontScale="100000"/>
+          </a:bodyPr>
+          <a:lstStyle xmlns:a="http://schemas.openxmlformats.org/drawingml/2006/main"/>
+          <a:p xmlns:a="http://schemas.openxmlformats.org/drawingml/2006/main">
+            <a:pPr algn="l">
+              <a:defRPr sz="1200" b="0">
+                <a:solidFill>
+                  <a:srgbClr val="475569"/>
+                </a:solidFill>
+                <a:latin typeface="Microsoft YaHei"/>
+                <a:ea typeface="Microsoft YaHei"/>
+                <a:cs typeface="Microsoft YaHei"/>
+              </a:defRPr>
+            </a:pPr>
+            <a:r>
+              <a:rPr sz="1200" b="0">
+                <a:solidFill>
+                  <a:srgbClr val="475569"/>
+                </a:solidFill>
+                <a:latin typeface="Microsoft YaHei"/>
+                <a:ea typeface="Microsoft YaHei"/>
+                <a:cs typeface="Microsoft YaHei"/>
+              </a:rPr>
+              <a:t>收集真实使用中的问题</a:t>
+            </a:r>
+          </a:p>
+        </p:txBody>
+      </p:sp>
+      <p:sp>
+        <p:nvSpPr>
+          <p:cNvPr id="18" name="PPAGENT_QA|parent=cycle-step-1|domains=cycle-card,cycle-content">
+            <a:extLst xmlns:a="http://schemas.openxmlformats.org/drawingml/2006/main">
+              <a:ext uri="{FF2B5EF4-FFF2-40B4-BE49-F238E27FC236}">
+                <a16:creationId xmlns:a16="http://schemas.microsoft.com/office/drawing/2014/main" id="{D8A1BCBD-B819-4790-BEB5-A6161EC22C80}"/>
+              </a:ext>
+            </a:extLst>
+          </p:cNvPr>
+          <p:cNvSpPr>
+            <a:spLocks xmlns:a="http://schemas.openxmlformats.org/drawingml/2006/main" noGrp="1"/>
+          </p:cNvSpPr>
+          <p:nvPr/>
+        </p:nvSpPr>
+        <p:spPr>
+          <a:xfrm xmlns:a="http://schemas.openxmlformats.org/drawingml/2006/main">
+            <a:off x="8705850" y="4819650"/>
+            <a:ext cx="2609850" cy="800100"/>
+          </a:xfrm>
+          <a:prstGeom xmlns:a="http://schemas.openxmlformats.org/drawingml/2006/main" prst="roundRect">
+            <a:avLst>
+              <a:gd name="adj" fmla="val 14286"/>
+            </a:avLst>
+          </a:prstGeom>
+          <a:solidFill xmlns:a="http://schemas.openxmlformats.org/drawingml/2006/main">
+            <a:srgbClr val="FFFFFF"/>
+          </a:solidFill>
+          <a:ln xmlns:a="http://schemas.openxmlformats.org/drawingml/2006/main" w="9525">
+            <a:solidFill>
+              <a:srgbClr val="D7E4EF"/>
+            </a:solidFill>
             <a:prstDash val="solid"/>
           </a:ln>
         </p:spPr>
         <p:style>
           <a:lnRef xmlns:a="http://schemas.openxmlformats.org/drawingml/2006/main" idx="0"/>
           <a:fillRef xmlns:a="http://schemas.openxmlformats.org/drawingml/2006/main" idx="0"/>
-          <a:effectRef xmlns:a="http://schemas.openxmlformats.org/drawingml/2006/main" idx="6"/>
+          <a:effectRef xmlns:a="http://schemas.openxmlformats.org/drawingml/2006/main" idx="4"/>
           <a:fontRef xmlns:a="http://schemas.openxmlformats.org/drawingml/2006/main" idx="major"/>
         </p:style>
+      </p:sp>
+      <p:sp>
+        <p:nvSpPr>
+          <p:cNvPr id="19" name="">
+            <a:extLst xmlns:a="http://schemas.openxmlformats.org/drawingml/2006/main">
+              <a:ext uri="{FF2B5EF4-FFF2-40B4-BE49-F238E27FC236}">
+                <a16:creationId xmlns:a16="http://schemas.microsoft.com/office/drawing/2014/main" id="{1FEBC2D0-440A-403F-923C-55ABA88A462A}"/>
+              </a:ext>
+            </a:extLst>
+          </p:cNvPr>
+          <p:cNvSpPr>
+            <a:spLocks xmlns:a="http://schemas.openxmlformats.org/drawingml/2006/main" noGrp="1"/>
+          </p:cNvSpPr>
+          <p:nvPr/>
+        </p:nvSpPr>
+        <p:spPr>
+          <a:xfrm xmlns:a="http://schemas.openxmlformats.org/drawingml/2006/main">
+            <a:off x="8705850" y="4981575"/>
+            <a:ext cx="476250" cy="476250"/>
+          </a:xfrm>
+          <a:prstGeom xmlns:a="http://schemas.openxmlformats.org/drawingml/2006/main" prst="ellipse">
+            <a:avLst/>
+          </a:prstGeom>
+          <a:solidFill xmlns:a="http://schemas.openxmlformats.org/drawingml/2006/main">
+            <a:srgbClr val="00A8D8"/>
+          </a:solidFill>
+          <a:ln xmlns:a="http://schemas.openxmlformats.org/drawingml/2006/main" w="19050">
+            <a:solidFill>
+              <a:srgbClr val="FFFFFF"/>
+            </a:solidFill>
+            <a:prstDash val="solid"/>
+          </a:ln>
+        </p:spPr>
         <p:txBody>
-          <a:bodyPr xmlns:a="http://schemas.openxmlformats.org/drawingml/2006/main" lIns="114300" tIns="76200" rIns="114300" bIns="76200" anchor="ctr">
+          <a:bodyPr xmlns:a="http://schemas.openxmlformats.org/drawingml/2006/main" lIns="0" tIns="0" rIns="0" bIns="0" anchor="ctr">
             <a:normAutofit fontScale="100000"/>
           </a:bodyPr>
           <a:lstStyle xmlns:a="http://schemas.openxmlformats.org/drawingml/2006/main"/>
           <a:p xmlns:a="http://schemas.openxmlformats.org/drawingml/2006/main">
             <a:pPr algn="ctr">
-              <a:defRPr sz="1500" b="1">
+              <a:defRPr sz="1200" b="1">
                 <a:solidFill>
                   <a:srgbClr val="FFFFFF"/>
                 </a:solidFill>
@@ -1355,7 +1895,7 @@
               </a:defRPr>
             </a:pPr>
             <a:r>
-              <a:rPr sz="1500" b="1">
+              <a:rPr sz="1200" b="1">
                 <a:solidFill>
                   <a:srgbClr val="FFFFFF"/>
                 </a:solidFill>
@@ -1363,55 +1903,231 @@
                 <a:ea typeface="Microsoft YaHei"/>
                 <a:cs typeface="Microsoft YaHei"/>
               </a:rPr>
-              <a:t>执行</a:t>
+              <a:t>02</a:t>
             </a:r>
           </a:p>
         </p:txBody>
       </p:sp>
       <p:sp>
         <p:nvSpPr>
-          <p:cNvPr id="6" name="">
-            <a:extLst xmlns:a="http://schemas.openxmlformats.org/drawingml/2006/main">
-              <a:ext uri="{FF2B5EF4-FFF2-40B4-BE49-F238E27FC236}">
-                <a16:creationId xmlns:a16="http://schemas.microsoft.com/office/drawing/2014/main" id="{D17D51E4-93E4-440C-9E8D-B0A76561929D}"/>
-              </a:ext>
-            </a:extLst>
-          </p:cNvPr>
-          <p:cNvSpPr>
-            <a:spLocks xmlns:a="http://schemas.openxmlformats.org/drawingml/2006/main" noGrp="1"/>
-          </p:cNvSpPr>
-          <p:nvPr/>
-        </p:nvSpPr>
-        <p:spPr>
-          <a:xfrm xmlns:a="http://schemas.openxmlformats.org/drawingml/2006/main">
-            <a:off x="4953000" y="4810125"/>
-            <a:ext cx="1619250" cy="1047750"/>
-          </a:xfrm>
-          <a:prstGeom xmlns:a="http://schemas.openxmlformats.org/drawingml/2006/main" prst="ellipse">
-            <a:avLst/>
-          </a:prstGeom>
-          <a:solidFill xmlns:a="http://schemas.openxmlformats.org/drawingml/2006/main">
-            <a:srgbClr val="14CBD1"/>
-          </a:solidFill>
+          <p:cNvPr id="20" name="">
+            <a:extLst xmlns:a="http://schemas.openxmlformats.org/drawingml/2006/main">
+              <a:ext uri="{FF2B5EF4-FFF2-40B4-BE49-F238E27FC236}">
+                <a16:creationId xmlns:a16="http://schemas.microsoft.com/office/drawing/2014/main" id="{9381CA24-C962-48EF-9862-D983576F5D2A}"/>
+              </a:ext>
+            </a:extLst>
+          </p:cNvPr>
+          <p:cNvSpPr>
+            <a:spLocks xmlns:a="http://schemas.openxmlformats.org/drawingml/2006/main" noGrp="1"/>
+          </p:cNvSpPr>
+          <p:nvPr/>
+        </p:nvSpPr>
+        <p:spPr>
+          <a:xfrm xmlns:a="http://schemas.openxmlformats.org/drawingml/2006/main">
+            <a:off x="9334500" y="4933950"/>
+            <a:ext cx="1790700" cy="266700"/>
+          </a:xfrm>
+          <a:prstGeom xmlns:a="http://schemas.openxmlformats.org/drawingml/2006/main" prst="rect">
+            <a:avLst/>
+          </a:prstGeom>
+          <a:noFill xmlns:a="http://schemas.openxmlformats.org/drawingml/2006/main"/>
           <a:ln xmlns:a="http://schemas.openxmlformats.org/drawingml/2006/main" w="0">
             <a:noFill/>
+            <a:prstDash val="solid"/>
+          </a:ln>
+        </p:spPr>
+        <p:txBody>
+          <a:bodyPr xmlns:a="http://schemas.openxmlformats.org/drawingml/2006/main" lIns="0" tIns="0" rIns="0" bIns="0" anchor="ctr">
+            <a:normAutofit fontScale="100000"/>
+          </a:bodyPr>
+          <a:lstStyle xmlns:a="http://schemas.openxmlformats.org/drawingml/2006/main"/>
+          <a:p xmlns:a="http://schemas.openxmlformats.org/drawingml/2006/main">
+            <a:pPr algn="l">
+              <a:defRPr sz="1425" b="1">
+                <a:solidFill>
+                  <a:srgbClr val="1677C8"/>
+                </a:solidFill>
+                <a:latin typeface="Microsoft YaHei"/>
+                <a:ea typeface="Microsoft YaHei"/>
+                <a:cs typeface="Microsoft YaHei"/>
+              </a:defRPr>
+            </a:pPr>
+            <a:r>
+              <a:rPr sz="1425" b="1">
+                <a:solidFill>
+                  <a:srgbClr val="1677C8"/>
+                </a:solidFill>
+                <a:latin typeface="Microsoft YaHei"/>
+                <a:ea typeface="Microsoft YaHei"/>
+                <a:cs typeface="Microsoft YaHei"/>
+              </a:rPr>
+              <a:t>判断</a:t>
+            </a:r>
+          </a:p>
+        </p:txBody>
+      </p:sp>
+      <p:sp>
+        <p:nvSpPr>
+          <p:cNvPr id="21" name="">
+            <a:extLst xmlns:a="http://schemas.openxmlformats.org/drawingml/2006/main">
+              <a:ext uri="{FF2B5EF4-FFF2-40B4-BE49-F238E27FC236}">
+                <a16:creationId xmlns:a16="http://schemas.microsoft.com/office/drawing/2014/main" id="{677C4D05-5431-44CD-8079-D7B48EA667D4}"/>
+              </a:ext>
+            </a:extLst>
+          </p:cNvPr>
+          <p:cNvSpPr>
+            <a:spLocks xmlns:a="http://schemas.openxmlformats.org/drawingml/2006/main" noGrp="1"/>
+          </p:cNvSpPr>
+          <p:nvPr/>
+        </p:nvSpPr>
+        <p:spPr>
+          <a:xfrm xmlns:a="http://schemas.openxmlformats.org/drawingml/2006/main">
+            <a:off x="9334500" y="5219700"/>
+            <a:ext cx="1790700" cy="323850"/>
+          </a:xfrm>
+          <a:prstGeom xmlns:a="http://schemas.openxmlformats.org/drawingml/2006/main" prst="rect">
+            <a:avLst/>
+          </a:prstGeom>
+          <a:noFill xmlns:a="http://schemas.openxmlformats.org/drawingml/2006/main"/>
+          <a:ln xmlns:a="http://schemas.openxmlformats.org/drawingml/2006/main" w="0">
+            <a:noFill/>
+            <a:prstDash val="solid"/>
+          </a:ln>
+        </p:spPr>
+        <p:txBody>
+          <a:bodyPr xmlns:a="http://schemas.openxmlformats.org/drawingml/2006/main" lIns="0" tIns="0" rIns="0" bIns="0" anchor="ctr">
+            <a:normAutofit fontScale="88542"/>
+          </a:bodyPr>
+          <a:lstStyle xmlns:a="http://schemas.openxmlformats.org/drawingml/2006/main"/>
+          <a:p xmlns:a="http://schemas.openxmlformats.org/drawingml/2006/main">
+            <a:pPr algn="l">
+              <a:defRPr sz="1200" b="0">
+                <a:solidFill>
+                  <a:srgbClr val="475569"/>
+                </a:solidFill>
+                <a:latin typeface="Microsoft YaHei"/>
+                <a:ea typeface="Microsoft YaHei"/>
+                <a:cs typeface="Microsoft YaHei"/>
+              </a:defRPr>
+            </a:pPr>
+            <a:r>
+              <a:rPr sz="1200" b="0">
+                <a:solidFill>
+                  <a:srgbClr val="475569"/>
+                </a:solidFill>
+                <a:latin typeface="Microsoft YaHei"/>
+                <a:ea typeface="Microsoft YaHei"/>
+                <a:cs typeface="Microsoft YaHei"/>
+              </a:rPr>
+              <a:t>确认问题属于</a:t>
+            </a:r>
+          </a:p>
+          <a:p xmlns:a="http://schemas.openxmlformats.org/drawingml/2006/main">
+            <a:pPr algn="l">
+              <a:defRPr sz="1200" b="0">
+                <a:solidFill>
+                  <a:srgbClr val="475569"/>
+                </a:solidFill>
+                <a:latin typeface="Microsoft YaHei"/>
+                <a:ea typeface="Microsoft YaHei"/>
+                <a:cs typeface="Microsoft YaHei"/>
+              </a:defRPr>
+            </a:pPr>
+            <a:r>
+              <a:rPr sz="1200" b="0">
+                <a:solidFill>
+                  <a:srgbClr val="475569"/>
+                </a:solidFill>
+                <a:latin typeface="Microsoft YaHei"/>
+                <a:ea typeface="Microsoft YaHei"/>
+                <a:cs typeface="Microsoft YaHei"/>
+              </a:rPr>
+              <a:t>内容还是视觉</a:t>
+            </a:r>
+          </a:p>
+        </p:txBody>
+      </p:sp>
+      <p:sp>
+        <p:nvSpPr>
+          <p:cNvPr id="22" name="PPAGENT_QA|parent=cycle-step-3|domains=cycle-card,cycle-content">
+            <a:extLst xmlns:a="http://schemas.openxmlformats.org/drawingml/2006/main">
+              <a:ext uri="{FF2B5EF4-FFF2-40B4-BE49-F238E27FC236}">
+                <a16:creationId xmlns:a16="http://schemas.microsoft.com/office/drawing/2014/main" id="{DEDC0C42-5931-4435-8031-6E75F601D00E}"/>
+              </a:ext>
+            </a:extLst>
+          </p:cNvPr>
+          <p:cNvSpPr>
+            <a:spLocks xmlns:a="http://schemas.openxmlformats.org/drawingml/2006/main" noGrp="1"/>
+          </p:cNvSpPr>
+          <p:nvPr/>
+        </p:nvSpPr>
+        <p:spPr>
+          <a:xfrm xmlns:a="http://schemas.openxmlformats.org/drawingml/2006/main">
+            <a:off x="628650" y="1962150"/>
+            <a:ext cx="2609850" cy="800100"/>
+          </a:xfrm>
+          <a:prstGeom xmlns:a="http://schemas.openxmlformats.org/drawingml/2006/main" prst="roundRect">
+            <a:avLst>
+              <a:gd name="adj" fmla="val 14286"/>
+            </a:avLst>
+          </a:prstGeom>
+          <a:solidFill xmlns:a="http://schemas.openxmlformats.org/drawingml/2006/main">
+            <a:srgbClr val="FFFFFF"/>
+          </a:solidFill>
+          <a:ln xmlns:a="http://schemas.openxmlformats.org/drawingml/2006/main" w="9525">
+            <a:solidFill>
+              <a:srgbClr val="D7E4EF"/>
+            </a:solidFill>
             <a:prstDash val="solid"/>
           </a:ln>
         </p:spPr>
         <p:style>
           <a:lnRef xmlns:a="http://schemas.openxmlformats.org/drawingml/2006/main" idx="0"/>
           <a:fillRef xmlns:a="http://schemas.openxmlformats.org/drawingml/2006/main" idx="0"/>
-          <a:effectRef xmlns:a="http://schemas.openxmlformats.org/drawingml/2006/main" idx="6"/>
+          <a:effectRef xmlns:a="http://schemas.openxmlformats.org/drawingml/2006/main" idx="4"/>
           <a:fontRef xmlns:a="http://schemas.openxmlformats.org/drawingml/2006/main" idx="major"/>
         </p:style>
+      </p:sp>
+      <p:sp>
+        <p:nvSpPr>
+          <p:cNvPr id="23" name="">
+            <a:extLst xmlns:a="http://schemas.openxmlformats.org/drawingml/2006/main">
+              <a:ext uri="{FF2B5EF4-FFF2-40B4-BE49-F238E27FC236}">
+                <a16:creationId xmlns:a16="http://schemas.microsoft.com/office/drawing/2014/main" id="{2638C134-230D-4269-B608-03BF26058936}"/>
+              </a:ext>
+            </a:extLst>
+          </p:cNvPr>
+          <p:cNvSpPr>
+            <a:spLocks xmlns:a="http://schemas.openxmlformats.org/drawingml/2006/main" noGrp="1"/>
+          </p:cNvSpPr>
+          <p:nvPr/>
+        </p:nvSpPr>
+        <p:spPr>
+          <a:xfrm xmlns:a="http://schemas.openxmlformats.org/drawingml/2006/main">
+            <a:off x="2800350" y="2124075"/>
+            <a:ext cx="476250" cy="476250"/>
+          </a:xfrm>
+          <a:prstGeom xmlns:a="http://schemas.openxmlformats.org/drawingml/2006/main" prst="ellipse">
+            <a:avLst/>
+          </a:prstGeom>
+          <a:solidFill xmlns:a="http://schemas.openxmlformats.org/drawingml/2006/main">
+            <a:srgbClr val="00A8D8"/>
+          </a:solidFill>
+          <a:ln xmlns:a="http://schemas.openxmlformats.org/drawingml/2006/main" w="19050">
+            <a:solidFill>
+              <a:srgbClr val="FFFFFF"/>
+            </a:solidFill>
+            <a:prstDash val="solid"/>
+          </a:ln>
+        </p:spPr>
         <p:txBody>
-          <a:bodyPr xmlns:a="http://schemas.openxmlformats.org/drawingml/2006/main" lIns="114300" tIns="76200" rIns="114300" bIns="76200" anchor="ctr">
+          <a:bodyPr xmlns:a="http://schemas.openxmlformats.org/drawingml/2006/main" lIns="0" tIns="0" rIns="0" bIns="0" anchor="ctr">
             <a:normAutofit fontScale="100000"/>
           </a:bodyPr>
           <a:lstStyle xmlns:a="http://schemas.openxmlformats.org/drawingml/2006/main"/>
           <a:p xmlns:a="http://schemas.openxmlformats.org/drawingml/2006/main">
             <a:pPr algn="ctr">
-              <a:defRPr sz="1500" b="1">
+              <a:defRPr sz="1200" b="1">
                 <a:solidFill>
                   <a:srgbClr val="FFFFFF"/>
                 </a:solidFill>
@@ -1421,7 +2137,7 @@
               </a:defRPr>
             </a:pPr>
             <a:r>
-              <a:rPr sz="1500" b="1">
+              <a:rPr sz="1200" b="1">
                 <a:solidFill>
                   <a:srgbClr val="FFFFFF"/>
                 </a:solidFill>
@@ -1429,55 +2145,208 @@
                 <a:ea typeface="Microsoft YaHei"/>
                 <a:cs typeface="Microsoft YaHei"/>
               </a:rPr>
-              <a:t>检查</a:t>
+              <a:t>04</a:t>
             </a:r>
           </a:p>
         </p:txBody>
       </p:sp>
       <p:sp>
         <p:nvSpPr>
-          <p:cNvPr id="7" name="">
-            <a:extLst xmlns:a="http://schemas.openxmlformats.org/drawingml/2006/main">
-              <a:ext uri="{FF2B5EF4-FFF2-40B4-BE49-F238E27FC236}">
-                <a16:creationId xmlns:a16="http://schemas.microsoft.com/office/drawing/2014/main" id="{E35B1973-C1A1-4472-BE2C-689F4A16A904}"/>
-              </a:ext>
-            </a:extLst>
-          </p:cNvPr>
-          <p:cNvSpPr>
-            <a:spLocks xmlns:a="http://schemas.openxmlformats.org/drawingml/2006/main" noGrp="1"/>
-          </p:cNvSpPr>
-          <p:nvPr/>
-        </p:nvSpPr>
-        <p:spPr>
-          <a:xfrm xmlns:a="http://schemas.openxmlformats.org/drawingml/2006/main">
-            <a:off x="2619375" y="2857500"/>
-            <a:ext cx="1619250" cy="1047750"/>
-          </a:xfrm>
-          <a:prstGeom xmlns:a="http://schemas.openxmlformats.org/drawingml/2006/main" prst="ellipse">
-            <a:avLst/>
-          </a:prstGeom>
-          <a:solidFill xmlns:a="http://schemas.openxmlformats.org/drawingml/2006/main">
-            <a:srgbClr val="4C8FD8"/>
-          </a:solidFill>
+          <p:cNvPr id="24" name="">
+            <a:extLst xmlns:a="http://schemas.openxmlformats.org/drawingml/2006/main">
+              <a:ext uri="{FF2B5EF4-FFF2-40B4-BE49-F238E27FC236}">
+                <a16:creationId xmlns:a16="http://schemas.microsoft.com/office/drawing/2014/main" id="{C48CE5E6-A061-4F07-8CA7-13F396A98CA6}"/>
+              </a:ext>
+            </a:extLst>
+          </p:cNvPr>
+          <p:cNvSpPr>
+            <a:spLocks xmlns:a="http://schemas.openxmlformats.org/drawingml/2006/main" noGrp="1"/>
+          </p:cNvSpPr>
+          <p:nvPr/>
+        </p:nvSpPr>
+        <p:spPr>
+          <a:xfrm xmlns:a="http://schemas.openxmlformats.org/drawingml/2006/main">
+            <a:off x="800100" y="2076450"/>
+            <a:ext cx="1790700" cy="266700"/>
+          </a:xfrm>
+          <a:prstGeom xmlns:a="http://schemas.openxmlformats.org/drawingml/2006/main" prst="rect">
+            <a:avLst/>
+          </a:prstGeom>
+          <a:noFill xmlns:a="http://schemas.openxmlformats.org/drawingml/2006/main"/>
           <a:ln xmlns:a="http://schemas.openxmlformats.org/drawingml/2006/main" w="0">
             <a:noFill/>
+            <a:prstDash val="solid"/>
+          </a:ln>
+        </p:spPr>
+        <p:txBody>
+          <a:bodyPr xmlns:a="http://schemas.openxmlformats.org/drawingml/2006/main" lIns="0" tIns="0" rIns="0" bIns="0" anchor="ctr">
+            <a:normAutofit fontScale="100000"/>
+          </a:bodyPr>
+          <a:lstStyle xmlns:a="http://schemas.openxmlformats.org/drawingml/2006/main"/>
+          <a:p xmlns:a="http://schemas.openxmlformats.org/drawingml/2006/main">
+            <a:pPr algn="r">
+              <a:defRPr sz="1425" b="1">
+                <a:solidFill>
+                  <a:srgbClr val="1677C8"/>
+                </a:solidFill>
+                <a:latin typeface="Microsoft YaHei"/>
+                <a:ea typeface="Microsoft YaHei"/>
+                <a:cs typeface="Microsoft YaHei"/>
+              </a:defRPr>
+            </a:pPr>
+            <a:r>
+              <a:rPr sz="1425" b="1">
+                <a:solidFill>
+                  <a:srgbClr val="1677C8"/>
+                </a:solidFill>
+                <a:latin typeface="Microsoft YaHei"/>
+                <a:ea typeface="Microsoft YaHei"/>
+                <a:cs typeface="Microsoft YaHei"/>
+              </a:rPr>
+              <a:t>验证</a:t>
+            </a:r>
+          </a:p>
+        </p:txBody>
+      </p:sp>
+      <p:sp>
+        <p:nvSpPr>
+          <p:cNvPr id="25" name="">
+            <a:extLst xmlns:a="http://schemas.openxmlformats.org/drawingml/2006/main">
+              <a:ext uri="{FF2B5EF4-FFF2-40B4-BE49-F238E27FC236}">
+                <a16:creationId xmlns:a16="http://schemas.microsoft.com/office/drawing/2014/main" id="{390390B2-CB21-49D2-9A66-46E6F30C02EE}"/>
+              </a:ext>
+            </a:extLst>
+          </p:cNvPr>
+          <p:cNvSpPr>
+            <a:spLocks xmlns:a="http://schemas.openxmlformats.org/drawingml/2006/main" noGrp="1"/>
+          </p:cNvSpPr>
+          <p:nvPr/>
+        </p:nvSpPr>
+        <p:spPr>
+          <a:xfrm xmlns:a="http://schemas.openxmlformats.org/drawingml/2006/main">
+            <a:off x="800100" y="2362200"/>
+            <a:ext cx="1790700" cy="323850"/>
+          </a:xfrm>
+          <a:prstGeom xmlns:a="http://schemas.openxmlformats.org/drawingml/2006/main" prst="rect">
+            <a:avLst/>
+          </a:prstGeom>
+          <a:noFill xmlns:a="http://schemas.openxmlformats.org/drawingml/2006/main"/>
+          <a:ln xmlns:a="http://schemas.openxmlformats.org/drawingml/2006/main" w="0">
+            <a:noFill/>
+            <a:prstDash val="solid"/>
+          </a:ln>
+        </p:spPr>
+        <p:txBody>
+          <a:bodyPr xmlns:a="http://schemas.openxmlformats.org/drawingml/2006/main" lIns="0" tIns="0" rIns="0" bIns="0" anchor="ctr">
+            <a:normAutofit fontScale="100000"/>
+          </a:bodyPr>
+          <a:lstStyle xmlns:a="http://schemas.openxmlformats.org/drawingml/2006/main"/>
+          <a:p xmlns:a="http://schemas.openxmlformats.org/drawingml/2006/main">
+            <a:pPr algn="r">
+              <a:defRPr sz="1200" b="0">
+                <a:solidFill>
+                  <a:srgbClr val="475569"/>
+                </a:solidFill>
+                <a:latin typeface="Microsoft YaHei"/>
+                <a:ea typeface="Microsoft YaHei"/>
+                <a:cs typeface="Microsoft YaHei"/>
+              </a:defRPr>
+            </a:pPr>
+            <a:r>
+              <a:rPr sz="1200" b="0">
+                <a:solidFill>
+                  <a:srgbClr val="475569"/>
+                </a:solidFill>
+                <a:latin typeface="Microsoft YaHei"/>
+                <a:ea typeface="Microsoft YaHei"/>
+                <a:cs typeface="Microsoft YaHei"/>
+              </a:rPr>
+              <a:t>使用新稿件重新检查</a:t>
+            </a:r>
+          </a:p>
+        </p:txBody>
+      </p:sp>
+      <p:sp>
+        <p:nvSpPr>
+          <p:cNvPr id="26" name="PPAGENT_QA|parent=cycle-step-2|domains=cycle-card,cycle-content">
+            <a:extLst xmlns:a="http://schemas.openxmlformats.org/drawingml/2006/main">
+              <a:ext uri="{FF2B5EF4-FFF2-40B4-BE49-F238E27FC236}">
+                <a16:creationId xmlns:a16="http://schemas.microsoft.com/office/drawing/2014/main" id="{737A2565-0882-4D8B-A147-6851BA12D55A}"/>
+              </a:ext>
+            </a:extLst>
+          </p:cNvPr>
+          <p:cNvSpPr>
+            <a:spLocks xmlns:a="http://schemas.openxmlformats.org/drawingml/2006/main" noGrp="1"/>
+          </p:cNvSpPr>
+          <p:nvPr/>
+        </p:nvSpPr>
+        <p:spPr>
+          <a:xfrm xmlns:a="http://schemas.openxmlformats.org/drawingml/2006/main">
+            <a:off x="628650" y="4819650"/>
+            <a:ext cx="2609850" cy="800100"/>
+          </a:xfrm>
+          <a:prstGeom xmlns:a="http://schemas.openxmlformats.org/drawingml/2006/main" prst="roundRect">
+            <a:avLst>
+              <a:gd name="adj" fmla="val 14286"/>
+            </a:avLst>
+          </a:prstGeom>
+          <a:solidFill xmlns:a="http://schemas.openxmlformats.org/drawingml/2006/main">
+            <a:srgbClr val="FFFFFF"/>
+          </a:solidFill>
+          <a:ln xmlns:a="http://schemas.openxmlformats.org/drawingml/2006/main" w="9525">
+            <a:solidFill>
+              <a:srgbClr val="D7E4EF"/>
+            </a:solidFill>
             <a:prstDash val="solid"/>
           </a:ln>
         </p:spPr>
         <p:style>
           <a:lnRef xmlns:a="http://schemas.openxmlformats.org/drawingml/2006/main" idx="0"/>
           <a:fillRef xmlns:a="http://schemas.openxmlformats.org/drawingml/2006/main" idx="0"/>
-          <a:effectRef xmlns:a="http://schemas.openxmlformats.org/drawingml/2006/main" idx="6"/>
+          <a:effectRef xmlns:a="http://schemas.openxmlformats.org/drawingml/2006/main" idx="4"/>
           <a:fontRef xmlns:a="http://schemas.openxmlformats.org/drawingml/2006/main" idx="major"/>
         </p:style>
+      </p:sp>
+      <p:sp>
+        <p:nvSpPr>
+          <p:cNvPr id="27" name="">
+            <a:extLst xmlns:a="http://schemas.openxmlformats.org/drawingml/2006/main">
+              <a:ext uri="{FF2B5EF4-FFF2-40B4-BE49-F238E27FC236}">
+                <a16:creationId xmlns:a16="http://schemas.microsoft.com/office/drawing/2014/main" id="{84948A8F-4303-4B61-88DB-95AD034373E3}"/>
+              </a:ext>
+            </a:extLst>
+          </p:cNvPr>
+          <p:cNvSpPr>
+            <a:spLocks xmlns:a="http://schemas.openxmlformats.org/drawingml/2006/main" noGrp="1"/>
+          </p:cNvSpPr>
+          <p:nvPr/>
+        </p:nvSpPr>
+        <p:spPr>
+          <a:xfrm xmlns:a="http://schemas.openxmlformats.org/drawingml/2006/main">
+            <a:off x="2800350" y="4981575"/>
+            <a:ext cx="476250" cy="476250"/>
+          </a:xfrm>
+          <a:prstGeom xmlns:a="http://schemas.openxmlformats.org/drawingml/2006/main" prst="ellipse">
+            <a:avLst/>
+          </a:prstGeom>
+          <a:solidFill xmlns:a="http://schemas.openxmlformats.org/drawingml/2006/main">
+            <a:srgbClr val="1677C8"/>
+          </a:solidFill>
+          <a:ln xmlns:a="http://schemas.openxmlformats.org/drawingml/2006/main" w="19050">
+            <a:solidFill>
+              <a:srgbClr val="FFFFFF"/>
+            </a:solidFill>
+            <a:prstDash val="solid"/>
+          </a:ln>
+        </p:spPr>
         <p:txBody>
-          <a:bodyPr xmlns:a="http://schemas.openxmlformats.org/drawingml/2006/main" lIns="114300" tIns="76200" rIns="114300" bIns="76200" anchor="ctr">
+          <a:bodyPr xmlns:a="http://schemas.openxmlformats.org/drawingml/2006/main" lIns="0" tIns="0" rIns="0" bIns="0" anchor="ctr">
             <a:normAutofit fontScale="100000"/>
           </a:bodyPr>
           <a:lstStyle xmlns:a="http://schemas.openxmlformats.org/drawingml/2006/main"/>
           <a:p xmlns:a="http://schemas.openxmlformats.org/drawingml/2006/main">
             <a:pPr algn="ctr">
-              <a:defRPr sz="1500" b="1">
+              <a:defRPr sz="1200" b="1">
                 <a:solidFill>
                   <a:srgbClr val="FFFFFF"/>
                 </a:solidFill>
@@ -1487,7 +2356,7 @@
               </a:defRPr>
             </a:pPr>
             <a:r>
-              <a:rPr sz="1500" b="1">
+              <a:rPr sz="1200" b="1">
                 <a:solidFill>
                   <a:srgbClr val="FFFFFF"/>
                 </a:solidFill>
@@ -1495,127 +2364,154 @@
                 <a:ea typeface="Microsoft YaHei"/>
                 <a:cs typeface="Microsoft YaHei"/>
               </a:rPr>
-              <a:t>改进</a:t>
+              <a:t>03</a:t>
             </a:r>
           </a:p>
         </p:txBody>
       </p:sp>
-      <p:cxnSp>
-        <p:nvCxnSpPr>
-          <p:cNvPr id="19" name=""/>
-          <p:cNvCxnSpPr>
-            <a:stCxn xmlns:a="http://schemas.openxmlformats.org/drawingml/2006/main" id="4" idx="5"/>
-            <a:endCxn xmlns:a="http://schemas.openxmlformats.org/drawingml/2006/main" id="5" idx="1"/>
-          </p:cNvCxnSpPr>
-          <p:nvPr/>
-        </p:nvCxnSpPr>
-        <p:spPr>
-          <a:xfrm xmlns:a="http://schemas.openxmlformats.org/drawingml/2006/main" rot="16200000" flipH="1">
-            <a:off x="6561686" y="2048866"/>
-            <a:ext cx="735504" cy="1188642"/>
-          </a:xfrm>
-          <a:prstGeom xmlns:a="http://schemas.openxmlformats.org/drawingml/2006/main" prst="curvedConnector3">
-            <a:avLst>
-              <a:gd name="adj1" fmla="val 50000"/>
-            </a:avLst>
-          </a:prstGeom>
-          <a:ln xmlns:a="http://schemas.openxmlformats.org/drawingml/2006/main" w="28575">
-            <a:solidFill>
-              <a:srgbClr val="1677C8"/>
-            </a:solidFill>
-            <a:prstDash val="solid"/>
-            <a:tailEnd type="triangle" w="med" len="med"/>
-          </a:ln>
-        </p:spPr>
-      </p:cxnSp>
-      <p:cxnSp>
-        <p:nvCxnSpPr>
-          <p:cNvPr id="20" name=""/>
-          <p:cNvCxnSpPr>
-            <a:stCxn xmlns:a="http://schemas.openxmlformats.org/drawingml/2006/main" id="5" idx="3"/>
-            <a:endCxn xmlns:a="http://schemas.openxmlformats.org/drawingml/2006/main" id="6" idx="7"/>
-          </p:cNvCxnSpPr>
-          <p:nvPr/>
-        </p:nvCxnSpPr>
-        <p:spPr>
-          <a:xfrm xmlns:a="http://schemas.openxmlformats.org/drawingml/2006/main" rot="5400000">
-            <a:off x="6323561" y="3763366"/>
-            <a:ext cx="1211754" cy="1188642"/>
-          </a:xfrm>
-          <a:prstGeom xmlns:a="http://schemas.openxmlformats.org/drawingml/2006/main" prst="curvedConnector3">
-            <a:avLst>
-              <a:gd name="adj1" fmla="val 50000"/>
-            </a:avLst>
-          </a:prstGeom>
-          <a:ln xmlns:a="http://schemas.openxmlformats.org/drawingml/2006/main" w="28575">
-            <a:solidFill>
-              <a:srgbClr val="1677C8"/>
-            </a:solidFill>
-            <a:prstDash val="solid"/>
-            <a:tailEnd type="triangle" w="med" len="med"/>
-          </a:ln>
-        </p:spPr>
-      </p:cxnSp>
-      <p:cxnSp>
-        <p:nvCxnSpPr>
-          <p:cNvPr id="21" name=""/>
-          <p:cNvCxnSpPr>
-            <a:stCxn xmlns:a="http://schemas.openxmlformats.org/drawingml/2006/main" id="6" idx="1"/>
-            <a:endCxn xmlns:a="http://schemas.openxmlformats.org/drawingml/2006/main" id="7" idx="5"/>
-          </p:cNvCxnSpPr>
-          <p:nvPr/>
-        </p:nvCxnSpPr>
-        <p:spPr>
-          <a:xfrm xmlns:a="http://schemas.openxmlformats.org/drawingml/2006/main" rot="16200000" flipH="1">
-            <a:off x="3989936" y="3763366"/>
-            <a:ext cx="1211754" cy="1188642"/>
-          </a:xfrm>
-          <a:prstGeom xmlns:a="http://schemas.openxmlformats.org/drawingml/2006/main" prst="curvedConnector3">
-            <a:avLst>
-              <a:gd name="adj1" fmla="val 50000"/>
-            </a:avLst>
-          </a:prstGeom>
-          <a:ln xmlns:a="http://schemas.openxmlformats.org/drawingml/2006/main" w="28575">
-            <a:solidFill>
-              <a:srgbClr val="1677C8"/>
-            </a:solidFill>
-            <a:prstDash val="solid"/>
-            <a:tailEnd type="triangle" w="med" len="med"/>
-          </a:ln>
-        </p:spPr>
-      </p:cxnSp>
-      <p:cxnSp>
-        <p:nvCxnSpPr>
-          <p:cNvPr id="22" name=""/>
-          <p:cNvCxnSpPr>
-            <a:stCxn xmlns:a="http://schemas.openxmlformats.org/drawingml/2006/main" id="7" idx="7"/>
-            <a:endCxn xmlns:a="http://schemas.openxmlformats.org/drawingml/2006/main" id="4" idx="3"/>
-          </p:cNvCxnSpPr>
-          <p:nvPr/>
-        </p:nvCxnSpPr>
-        <p:spPr>
-          <a:xfrm xmlns:a="http://schemas.openxmlformats.org/drawingml/2006/main" rot="5400000">
-            <a:off x="4228061" y="2048866"/>
-            <a:ext cx="735504" cy="1188642"/>
-          </a:xfrm>
-          <a:prstGeom xmlns:a="http://schemas.openxmlformats.org/drawingml/2006/main" prst="curvedConnector3">
-            <a:avLst>
-              <a:gd name="adj1" fmla="val 50000"/>
-            </a:avLst>
-          </a:prstGeom>
-          <a:ln xmlns:a="http://schemas.openxmlformats.org/drawingml/2006/main" w="28575">
-            <a:solidFill>
-              <a:srgbClr val="1677C8"/>
-            </a:solidFill>
-            <a:prstDash val="solid"/>
-            <a:tailEnd type="triangle" w="med" len="med"/>
-          </a:ln>
-        </p:spPr>
-      </p:cxnSp>
+      <p:sp>
+        <p:nvSpPr>
+          <p:cNvPr id="28" name="">
+            <a:extLst xmlns:a="http://schemas.openxmlformats.org/drawingml/2006/main">
+              <a:ext uri="{FF2B5EF4-FFF2-40B4-BE49-F238E27FC236}">
+                <a16:creationId xmlns:a16="http://schemas.microsoft.com/office/drawing/2014/main" id="{050ECA33-3C1B-4FFC-9D46-890E8837EE89}"/>
+              </a:ext>
+            </a:extLst>
+          </p:cNvPr>
+          <p:cNvSpPr>
+            <a:spLocks xmlns:a="http://schemas.openxmlformats.org/drawingml/2006/main" noGrp="1"/>
+          </p:cNvSpPr>
+          <p:nvPr/>
+        </p:nvSpPr>
+        <p:spPr>
+          <a:xfrm xmlns:a="http://schemas.openxmlformats.org/drawingml/2006/main">
+            <a:off x="800100" y="4933950"/>
+            <a:ext cx="1790700" cy="266700"/>
+          </a:xfrm>
+          <a:prstGeom xmlns:a="http://schemas.openxmlformats.org/drawingml/2006/main" prst="rect">
+            <a:avLst/>
+          </a:prstGeom>
+          <a:noFill xmlns:a="http://schemas.openxmlformats.org/drawingml/2006/main"/>
+          <a:ln xmlns:a="http://schemas.openxmlformats.org/drawingml/2006/main" w="0">
+            <a:noFill/>
+            <a:prstDash val="solid"/>
+          </a:ln>
+        </p:spPr>
+        <p:txBody>
+          <a:bodyPr xmlns:a="http://schemas.openxmlformats.org/drawingml/2006/main" lIns="0" tIns="0" rIns="0" bIns="0" anchor="ctr">
+            <a:normAutofit fontScale="100000"/>
+          </a:bodyPr>
+          <a:lstStyle xmlns:a="http://schemas.openxmlformats.org/drawingml/2006/main"/>
+          <a:p xmlns:a="http://schemas.openxmlformats.org/drawingml/2006/main">
+            <a:pPr algn="r">
+              <a:defRPr sz="1425" b="1">
+                <a:solidFill>
+                  <a:srgbClr val="1677C8"/>
+                </a:solidFill>
+                <a:latin typeface="Microsoft YaHei"/>
+                <a:ea typeface="Microsoft YaHei"/>
+                <a:cs typeface="Microsoft YaHei"/>
+              </a:defRPr>
+            </a:pPr>
+            <a:r>
+              <a:rPr sz="1425" b="1">
+                <a:solidFill>
+                  <a:srgbClr val="1677C8"/>
+                </a:solidFill>
+                <a:latin typeface="Microsoft YaHei"/>
+                <a:ea typeface="Microsoft YaHei"/>
+                <a:cs typeface="Microsoft YaHei"/>
+              </a:rPr>
+              <a:t>修正</a:t>
+            </a:r>
+          </a:p>
+        </p:txBody>
+      </p:sp>
+      <p:sp>
+        <p:nvSpPr>
+          <p:cNvPr id="29" name="">
+            <a:extLst xmlns:a="http://schemas.openxmlformats.org/drawingml/2006/main">
+              <a:ext uri="{FF2B5EF4-FFF2-40B4-BE49-F238E27FC236}">
+                <a16:creationId xmlns:a16="http://schemas.microsoft.com/office/drawing/2014/main" id="{BB76CE5B-B6B8-4F0C-B9C1-234B3C9124DE}"/>
+              </a:ext>
+            </a:extLst>
+          </p:cNvPr>
+          <p:cNvSpPr>
+            <a:spLocks xmlns:a="http://schemas.openxmlformats.org/drawingml/2006/main" noGrp="1"/>
+          </p:cNvSpPr>
+          <p:nvPr/>
+        </p:nvSpPr>
+        <p:spPr>
+          <a:xfrm xmlns:a="http://schemas.openxmlformats.org/drawingml/2006/main">
+            <a:off x="800100" y="5219700"/>
+            <a:ext cx="1790700" cy="323850"/>
+          </a:xfrm>
+          <a:prstGeom xmlns:a="http://schemas.openxmlformats.org/drawingml/2006/main" prst="rect">
+            <a:avLst/>
+          </a:prstGeom>
+          <a:noFill xmlns:a="http://schemas.openxmlformats.org/drawingml/2006/main"/>
+          <a:ln xmlns:a="http://schemas.openxmlformats.org/drawingml/2006/main" w="0">
+            <a:noFill/>
+            <a:prstDash val="solid"/>
+          </a:ln>
+        </p:spPr>
+        <p:txBody>
+          <a:bodyPr xmlns:a="http://schemas.openxmlformats.org/drawingml/2006/main" lIns="0" tIns="0" rIns="0" bIns="0" anchor="ctr">
+            <a:normAutofit fontScale="88542"/>
+          </a:bodyPr>
+          <a:lstStyle xmlns:a="http://schemas.openxmlformats.org/drawingml/2006/main"/>
+          <a:p xmlns:a="http://schemas.openxmlformats.org/drawingml/2006/main">
+            <a:pPr algn="r">
+              <a:defRPr sz="1200" b="0">
+                <a:solidFill>
+                  <a:srgbClr val="475569"/>
+                </a:solidFill>
+                <a:latin typeface="Microsoft YaHei"/>
+                <a:ea typeface="Microsoft YaHei"/>
+                <a:cs typeface="Microsoft YaHei"/>
+              </a:defRPr>
+            </a:pPr>
+            <a:r>
+              <a:rPr sz="1200" b="0">
+                <a:solidFill>
+                  <a:srgbClr val="475569"/>
+                </a:solidFill>
+                <a:latin typeface="Microsoft YaHei"/>
+                <a:ea typeface="Microsoft YaHei"/>
+                <a:cs typeface="Microsoft YaHei"/>
+              </a:rPr>
+              <a:t>更新规则、</a:t>
+            </a:r>
+          </a:p>
+          <a:p xmlns:a="http://schemas.openxmlformats.org/drawingml/2006/main">
+            <a:pPr algn="r">
+              <a:defRPr sz="1200" b="0">
+                <a:solidFill>
+                  <a:srgbClr val="475569"/>
+                </a:solidFill>
+                <a:latin typeface="Microsoft YaHei"/>
+                <a:ea typeface="Microsoft YaHei"/>
+                <a:cs typeface="Microsoft YaHei"/>
+              </a:defRPr>
+            </a:pPr>
+            <a:r>
+              <a:rPr sz="1200" b="0">
+                <a:solidFill>
+                  <a:srgbClr val="475569"/>
+                </a:solidFill>
+                <a:latin typeface="Microsoft YaHei"/>
+                <a:ea typeface="Microsoft YaHei"/>
+                <a:cs typeface="Microsoft YaHei"/>
+              </a:rPr>
+              <a:t>资产或渲染代码</a:t>
+            </a:r>
+          </a:p>
+        </p:txBody>
+      </p:sp>
     </p:spTree>
     <p:extLst>
       <p:ext uri="{BB962C8B-B14F-4D97-AF65-F5344CB8AC3E}">
-        <p14:creationId xmlns:p14="http://schemas.microsoft.com/office/powerpoint/2010/main" val="1329026161"/>
+        <p14:creationId xmlns:p14="http://schemas.microsoft.com/office/powerpoint/2010/main" val="1866778130"/>
       </p:ext>
     </p:extLst>
   </p:cSld>
